--- a/deck/journey/Value.pptx
+++ b/deck/journey/Value.pptx
@@ -503,9 +503,9 @@
             <a:r>
               <a:rPr lang="en-US" dirty="0"/>
               <a:t>The last slide said fast is not the same as right. So what do we get if we get it right? I like to answer that two ways: value to the business, and value to the customer.
-For Humana, three things. First, the work is growing. Humana added about a million members in one month, roughly twenty percent more. Each member makes about two prior authorization requests a year, so that is roughly twenty percent more requests. Nurses do not grow twenty percent in a month. Second, everything is public now. Results are posted every year and compared by name, so right the first time becomes a number anyone can check. Third, revenue. If Humana looks like the industry, about nine percent of members leave each year. That is about eight billion dollars of premium in play. Winning back just one in ninety of those leavers is about ninety million dollars. I want to be honest here: I do not know how much of that leaving comes from prior authorization. So this is the size of the prize, and a pilot is how we would measure it.
+For Humana, three things. First, the work is growing. Humana added about a million members in one month, roughly twenty percent more. KFF found a Humana member makes about 2.2 prior authorization requests a year, the highest of the big plans. So a million new members is about 2.3 million more requests, and a nurse reads every one individually. Nurses do not grow twenty percent in a month. Second, everything is public now. Results are posted every year and compared by name, so right the first time becomes a number anyone can check. Third, revenue. If Humana looks like the industry, about nine percent of members leave each year. That is about eight billion dollars of premium in play. Winning back just one in ninety of those leavers is about ninety million dollars. I want to be honest here: I do not know how much of that leaving comes from prior authorization. So this is the size of the prize, and a pilot is how we would measure it.
 For the member and the provider, three things. Care starts on time, because a right first decision means no wait for a second look. Ninety-three percent of physicians say prior authorization can delay care. If something is missing, the provider gets one specific question, not a fax loop. And every recommendation shows the page behind it. Next, in phase two, members see where their request stands.
-Both sides want the same thing: right the first time.</a:t>
+Both sides want the same thing: right the first time. And here is why this is not about denying more. Medicare pays Humana a fixed amount per member, and at least eighty-five percent has to go to care. So the room to save is in admin work, like re-reading and rework. It is not in paying for less care. (If asked: how utilization costs are classified under that rule varies, so I would not quote a dollar split.)</a:t>
             </a:r>
             <a:endParaRPr lang="en-US" dirty="0"/>
           </a:p>
@@ -1003,8 +1003,8 @@
         </p:nvSpPr>
         <p:spPr>
           <a:xfrm>
-            <a:off x="457200" y="6537960"/>
-            <a:ext cx="11274552" cy="228600"/>
+            <a:off x="457200" y="6601968"/>
+            <a:ext cx="11274552" cy="201168"/>
           </a:xfrm>
           <a:prstGeom prst="rect">
             <a:avLst/>
@@ -1028,7 +1028,7 @@
                 <a:ea typeface="Calibri" pitchFamily="34" charset="-122"/>
                 <a:cs typeface="Calibri" pitchFamily="34" charset="-120"/>
               </a:rPr>
-              <a:t>Sources: Humana Q4 2025 financial tables (SEC). KFF. AMA 2025 survey. CMS-0057-F. Revenue figures are the size of the prize, not a forecast.</a:t>
+              <a:t>Sources: Humana Q4 2025 financial tables (SEC). KFF. AMA 2025 survey. CMS-0057-F. 42 CFR 422.2410 (85% minimum medical loss ratio). Revenue figures are the size of the prize, not a forecast.</a:t>
             </a:r>
             <a:endParaRPr lang="en-US" sz="900" dirty="0"/>
           </a:p>
@@ -1042,12 +1042,12 @@
         </p:nvSpPr>
         <p:spPr>
           <a:xfrm>
-            <a:off x="457200" y="1371600"/>
-            <a:ext cx="5559552" cy="4572000"/>
+            <a:off x="457200" y="1325880"/>
+            <a:ext cx="5559552" cy="4434840"/>
           </a:xfrm>
           <a:prstGeom prst="roundRect">
             <a:avLst>
-              <a:gd name="adj" fmla="val 2000"/>
+              <a:gd name="adj" fmla="val 2062"/>
             </a:avLst>
           </a:prstGeom>
           <a:solidFill>
@@ -1086,7 +1086,7 @@
         </p:nvSpPr>
         <p:spPr>
           <a:xfrm>
-            <a:off x="640080" y="1444752"/>
+            <a:off x="640080" y="1389888"/>
             <a:ext cx="5193792" cy="292608"/>
           </a:xfrm>
           <a:prstGeom prst="rect">
@@ -1125,12 +1125,12 @@
         </p:nvSpPr>
         <p:spPr>
           <a:xfrm>
-            <a:off x="603504" y="1828800"/>
-            <a:ext cx="5266944" cy="1280160"/>
+            <a:off x="603504" y="1783080"/>
+            <a:ext cx="5266944" cy="1261872"/>
           </a:xfrm>
           <a:prstGeom prst="roundRect">
             <a:avLst>
-              <a:gd name="adj" fmla="val 5714"/>
+              <a:gd name="adj" fmla="val 5797"/>
             </a:avLst>
           </a:prstGeom>
           <a:solidFill>
@@ -1158,7 +1158,7 @@
                 <a:ea typeface="Cambria" pitchFamily="34" charset="-122"/>
                 <a:cs typeface="Cambria" pitchFamily="34" charset="-120"/>
               </a:rPr>
-              <a:t>+20%</a:t>
+              <a:t>+2.3 million</a:t>
             </a:r>
             <a:endParaRPr lang="en-US" sz="2200" dirty="0"/>
           </a:p>
@@ -1178,7 +1178,7 @@
                 <a:ea typeface="Calibri" pitchFamily="34" charset="-122"/>
                 <a:cs typeface="Calibri" pitchFamily="34" charset="-120"/>
               </a:rPr>
-              <a:t>more members in one month, so about 20% more requests to read.</a:t>
+              <a:t>more requests a year, and a nurse reads every one.</a:t>
             </a:r>
             <a:endParaRPr lang="en-US" sz="2200" dirty="0"/>
           </a:p>
@@ -1195,7 +1195,7 @@
                 <a:ea typeface="Calibri" pitchFamily="34" charset="-122"/>
                 <a:cs typeface="Calibri" pitchFamily="34" charset="-120"/>
               </a:rPr>
-              <a:t>Humana, January 2026 against the end of 2025. Nurses do not grow that fast.</a:t>
+              <a:t>1.03 million new members (+20%, 5.25M to 6.28M) × 2.2 requests each (KFF, highest of the big plans). Nurses do not grow 20% in a month.</a:t>
             </a:r>
             <a:endParaRPr lang="en-US" sz="2200" dirty="0"/>
           </a:p>
@@ -1209,12 +1209,12 @@
         </p:nvSpPr>
         <p:spPr>
           <a:xfrm>
-            <a:off x="603504" y="3200400"/>
-            <a:ext cx="5266944" cy="1280160"/>
+            <a:off x="603504" y="3108960"/>
+            <a:ext cx="5266944" cy="1261872"/>
           </a:xfrm>
           <a:prstGeom prst="roundRect">
             <a:avLst>
-              <a:gd name="adj" fmla="val 5714"/>
+              <a:gd name="adj" fmla="val 5797"/>
             </a:avLst>
           </a:prstGeom>
           <a:solidFill>
@@ -1293,12 +1293,12 @@
         </p:nvSpPr>
         <p:spPr>
           <a:xfrm>
-            <a:off x="603504" y="4572000"/>
-            <a:ext cx="5266944" cy="1280160"/>
+            <a:off x="603504" y="4434840"/>
+            <a:ext cx="5266944" cy="1261872"/>
           </a:xfrm>
           <a:prstGeom prst="roundRect">
             <a:avLst>
-              <a:gd name="adj" fmla="val 5714"/>
+              <a:gd name="adj" fmla="val 5797"/>
             </a:avLst>
           </a:prstGeom>
           <a:solidFill>
@@ -1377,12 +1377,12 @@
         </p:nvSpPr>
         <p:spPr>
           <a:xfrm>
-            <a:off x="6172200" y="1371600"/>
-            <a:ext cx="5559552" cy="4572000"/>
+            <a:off x="6172200" y="1325880"/>
+            <a:ext cx="5559552" cy="4434840"/>
           </a:xfrm>
           <a:prstGeom prst="roundRect">
             <a:avLst>
-              <a:gd name="adj" fmla="val 2000"/>
+              <a:gd name="adj" fmla="val 2062"/>
             </a:avLst>
           </a:prstGeom>
           <a:solidFill>
@@ -1421,7 +1421,7 @@
         </p:nvSpPr>
         <p:spPr>
           <a:xfrm>
-            <a:off x="6355080" y="1444752"/>
+            <a:off x="6355080" y="1389888"/>
             <a:ext cx="5193792" cy="292608"/>
           </a:xfrm>
           <a:prstGeom prst="rect">
@@ -1460,12 +1460,12 @@
         </p:nvSpPr>
         <p:spPr>
           <a:xfrm>
-            <a:off x="6318504" y="1828800"/>
-            <a:ext cx="5266944" cy="1280160"/>
+            <a:off x="6318504" y="1783080"/>
+            <a:ext cx="5266944" cy="1261872"/>
           </a:xfrm>
           <a:prstGeom prst="roundRect">
             <a:avLst>
-              <a:gd name="adj" fmla="val 5714"/>
+              <a:gd name="adj" fmla="val 5797"/>
             </a:avLst>
           </a:prstGeom>
           <a:solidFill>
@@ -1544,12 +1544,12 @@
         </p:nvSpPr>
         <p:spPr>
           <a:xfrm>
-            <a:off x="6318504" y="3200400"/>
-            <a:ext cx="5266944" cy="1280160"/>
+            <a:off x="6318504" y="3108960"/>
+            <a:ext cx="5266944" cy="1261872"/>
           </a:xfrm>
           <a:prstGeom prst="roundRect">
             <a:avLst>
-              <a:gd name="adj" fmla="val 5714"/>
+              <a:gd name="adj" fmla="val 5797"/>
             </a:avLst>
           </a:prstGeom>
           <a:solidFill>
@@ -1628,12 +1628,12 @@
         </p:nvSpPr>
         <p:spPr>
           <a:xfrm>
-            <a:off x="6318504" y="4572000"/>
-            <a:ext cx="5266944" cy="1280160"/>
+            <a:off x="6318504" y="4434840"/>
+            <a:ext cx="5266944" cy="1261872"/>
           </a:xfrm>
           <a:prstGeom prst="roundRect">
             <a:avLst>
-              <a:gd name="adj" fmla="val 5714"/>
+              <a:gd name="adj" fmla="val 5797"/>
             </a:avLst>
           </a:prstGeom>
           <a:solidFill>
@@ -1712,12 +1712,12 @@
         </p:nvSpPr>
         <p:spPr>
           <a:xfrm>
-            <a:off x="457200" y="6035040"/>
-            <a:ext cx="11274552" cy="457200"/>
+            <a:off x="457200" y="5852160"/>
+            <a:ext cx="11274552" cy="713232"/>
           </a:xfrm>
           <a:prstGeom prst="roundRect">
             <a:avLst>
-              <a:gd name="adj" fmla="val 16000"/>
+              <a:gd name="adj" fmla="val 10256"/>
             </a:avLst>
           </a:prstGeom>
           <a:solidFill>
@@ -1730,10 +1730,13 @@
           </a:ln>
         </p:spPr>
         <p:txBody>
-          <a:bodyPr wrap="square" lIns="182880" tIns="36576" rIns="182880" bIns="36576" rtlCol="0" anchor="ctr"/>
+          <a:bodyPr wrap="square" lIns="228600" tIns="45720" rIns="228600" bIns="45720" rtlCol="0" anchor="ctr"/>
           <a:lstStyle/>
           <a:p>
             <a:pPr algn="ctr" indent="0" marL="0">
+              <a:spcAft>
+                <a:spcPts val="200"/>
+              </a:spcAft>
               <a:buNone/>
             </a:pPr>
             <a:r>
@@ -1746,6 +1749,23 @@
                 <a:cs typeface="Calibri" pitchFamily="34" charset="-120"/>
               </a:rPr>
               <a:t>Same goal on both sides: right the first time.</a:t>
+            </a:r>
+            <a:endParaRPr lang="en-US" sz="1600" dirty="0"/>
+          </a:p>
+          <a:p>
+            <a:pPr algn="ctr" indent="0" marL="0">
+              <a:buNone/>
+            </a:pPr>
+            <a:r>
+              <a:rPr lang="en-US" sz="1150" dirty="0">
+                <a:solidFill>
+                  <a:srgbClr val="D5EBE3"/>
+                </a:solidFill>
+                <a:latin typeface="Calibri" pitchFamily="34" charset="0"/>
+                <a:ea typeface="Calibri" pitchFamily="34" charset="-122"/>
+                <a:cs typeface="Calibri" pitchFamily="34" charset="-120"/>
+              </a:rPr>
+              <a:t>Medicare pays Humana per member, and at least 85% must go to care. So the room to save is in admin work like re-reading and rework, not in paying for less care.</a:t>
             </a:r>
             <a:endParaRPr lang="en-US" sz="1600" dirty="0"/>
           </a:p>

--- a/deck/journey/Value.pptx
+++ b/deck/journey/Value.pptx
@@ -503,7 +503,7 @@
             <a:r>
               <a:rPr lang="en-US" dirty="0"/>
               <a:t>The last slide said fast is not the same as right. So what do we get if we get it right? I like to answer that two ways: value to the business, and value to the customer.
-For Humana, three things. First, the work is growing. Humana added about a million members in one month, roughly twenty percent more. KFF found a Humana member makes about 2.2 prior authorization requests a year, the highest of the big plans. So a million new members is about 2.3 million more requests, and a nurse reads every one individually. Nurses do not grow twenty percent in a month. Second, everything is public now. Results are posted every year and compared by name, so right the first time becomes a number anyone can check. Third, revenue. If Humana looks like the industry, about nine percent of members leave each year. That is about eight billion dollars of premium in play. Winning back just one in ninety of those leavers is about ninety million dollars. I want to be honest here: I do not know how much of that leaving comes from prior authorization. So this is the size of the prize, and a pilot is how we would measure it.
+For Humana, three things. First, the work is growing. About a million members joined Humana in January, roughly twenty percent more, all at once. KFF found a Humana member makes about 2.2 prior authorization requests a year, the highest of the big plans. So a million new members is about 2.3 million more requests over the year, about 190,000 more every month, and a nurse reads every one individually. Hiring and training cannot match a twenty percent jump that arrived in January. Second, everything is public now. Results are posted every year and compared by name, so right the first time becomes a number anyone can check. Third, revenue. If Humana looks like the industry, about nine percent of members leave each year. That is about eight billion dollars of premium in play. Winning back just one in ninety of those leavers is about ninety million dollars. I want to be honest here: I do not know how much of that leaving comes from prior authorization. So this is the size of the prize, and a pilot is how we would measure it.
 For the member and the provider, three things. Care starts on time, because a right first decision means no wait for a second look. Ninety-three percent of physicians say prior authorization can delay care. If something is missing, the provider gets one specific question, not a fax loop. And every recommendation shows the page behind it. Next, in phase two, members see where their request stands.
 Both sides want the same thing: right the first time. And here is why this is not about denying more. Medicare pays Humana a fixed amount per member, and at least eighty-five percent has to go to care. So the room to save is in admin work, like re-reading and rework. It is not in paying for less care. (If asked: how utilization costs are classified under that rule varies, so I would not quote a dollar split.)</a:t>
             </a:r>
@@ -1195,7 +1195,7 @@
                 <a:ea typeface="Calibri" pitchFamily="34" charset="-122"/>
                 <a:cs typeface="Calibri" pitchFamily="34" charset="-120"/>
               </a:rPr>
-              <a:t>1.03 million new members (+20%, 5.25M to 6.28M) × 2.2 requests each (KFF, highest of the big plans). Nurses do not grow 20% in a month.</a:t>
+              <a:t>1.03 million members joined in January (+20%) × 2.2 requests each a year (KFF, highest of the big plans). That is about 190,000 more every month.</a:t>
             </a:r>
             <a:endParaRPr lang="en-US" sz="2200" dirty="0"/>
           </a:p>

--- a/deck/journey/Value.pptx
+++ b/deck/journey/Value.pptx
@@ -503,7 +503,7 @@
             <a:r>
               <a:rPr lang="en-US" dirty="0"/>
               <a:t>The last slide said fast is not the same as right. So what do we get if we get it right? I like to answer that two ways: value to the business, and value to the customer.
-For Humana, three things. First, the work is growing. About a million members joined Humana in January, roughly twenty percent more, all at once. KFF found a Humana member makes about 2.2 prior authorization requests a year, the highest of the big plans. So a million new members is about 2.3 million more requests over the year, about 190,000 more every month, and a nurse reads every one individually. Hiring and training cannot match a twenty percent jump that arrived in January. Second, everything is public now. Results are posted every year and compared by name, so right the first time becomes a number anyone can check. Third, revenue. If Humana looks like the industry, about nine percent of members leave each year. That is about eight billion dollars of premium in play. Winning back just one in ninety of those leavers is about ninety million dollars. I want to be honest here: I do not know how much of that leaving comes from prior authorization. So this is the size of the prize, and a pilot is how we would measure it.
+For Humana, three things. First, the work is growing. About a million members joined Humana in January, roughly twenty percent more, all at once. KFF found Humana averages about 2.2 prior authorization requests per member per year. That is an average, so most members make none and some make many. If the new members look like the current ones, a million new members is about 2.3 million more requests over the year, about 190,000 more every month, and a nurse reads every one individually. Hiring and training cannot match a twenty percent jump that arrived in January. Second, everything is public now. Results are posted every year and compared by name, so right the first time becomes a number anyone can check. Third, revenue. If Humana looks like the industry, about nine percent of members leave each year. That is about eight billion dollars of premium in play. Winning back just one in ninety of those leavers is about ninety million dollars. I want to be honest here: I do not know how much of that leaving comes from prior authorization. So this is the size of the prize, and a pilot is how we would measure it.
 For the member and the provider, three things. Care starts on time, because a right first decision means no wait for a second look. Ninety-three percent of physicians say prior authorization can delay care. If something is missing, the provider gets one specific question, not a fax loop. And every recommendation shows the page behind it. Next, in phase two, members see where their request stands.
 Both sides want the same thing: right the first time. And here is why this is not about denying more. Medicare pays Humana a fixed amount per member, and at least eighty-five percent has to go to care. So the room to save is in admin work, like re-reading and rework. It is not in paying for less care. (If asked: how utilization costs are classified under that rule varies, so I would not quote a dollar split.)</a:t>
             </a:r>
@@ -1195,7 +1195,7 @@
                 <a:ea typeface="Calibri" pitchFamily="34" charset="-122"/>
                 <a:cs typeface="Calibri" pitchFamily="34" charset="-120"/>
               </a:rPr>
-              <a:t>1.03 million members joined in January (+20%) × 2.2 requests each a year (KFF, highest of the big plans). That is about 190,000 more every month.</a:t>
+              <a:t>1.03 million members joined in January (+20%) × about 2.2 requests per member a year, on average (KFF 2024). About 190,000 more every month.</a:t>
             </a:r>
             <a:endParaRPr lang="en-US" sz="2200" dirty="0"/>
           </a:p>
